--- a/화면구성도.pptx
+++ b/화면구성도.pptx
@@ -6,6 +6,8 @@
   </p:sldMasterIdLst>
   <p:sldIdLst>
     <p:sldId id="256" r:id="rId2"/>
+    <p:sldId id="257" r:id="rId3"/>
+    <p:sldId id="258" r:id="rId4"/>
   </p:sldIdLst>
   <p:sldSz cx="12192000" cy="6858000"/>
   <p:notesSz cx="6858000" cy="9144000"/>
@@ -104,6 +106,11 @@
       </a:defRPr>
     </a:lvl9pPr>
   </p:defaultTextStyle>
+  <p:extLst>
+    <p:ext uri="{EFAFB233-063F-42B5-8137-9DF3F51BA10A}">
+      <p15:sldGuideLst xmlns:p15="http://schemas.microsoft.com/office/powerpoint/2012/main"/>
+    </p:ext>
+  </p:extLst>
 </p:presentation>
 </file>
 
@@ -254,7 +261,7 @@
           <a:p>
             <a:fld id="{46F295C0-A7ED-4981-BDF3-50DDEF888CA2}" type="datetimeFigureOut">
               <a:rPr lang="ko-KR" altLang="en-US" smtClean="0"/>
-              <a:t>2025-09-19</a:t>
+              <a:t>2025-09-20</a:t>
             </a:fld>
             <a:endParaRPr lang="ko-KR" altLang="en-US"/>
           </a:p>
@@ -452,7 +459,7 @@
           <a:p>
             <a:fld id="{46F295C0-A7ED-4981-BDF3-50DDEF888CA2}" type="datetimeFigureOut">
               <a:rPr lang="ko-KR" altLang="en-US" smtClean="0"/>
-              <a:t>2025-09-19</a:t>
+              <a:t>2025-09-20</a:t>
             </a:fld>
             <a:endParaRPr lang="ko-KR" altLang="en-US"/>
           </a:p>
@@ -660,7 +667,7 @@
           <a:p>
             <a:fld id="{46F295C0-A7ED-4981-BDF3-50DDEF888CA2}" type="datetimeFigureOut">
               <a:rPr lang="ko-KR" altLang="en-US" smtClean="0"/>
-              <a:t>2025-09-19</a:t>
+              <a:t>2025-09-20</a:t>
             </a:fld>
             <a:endParaRPr lang="ko-KR" altLang="en-US"/>
           </a:p>
@@ -858,7 +865,7 @@
           <a:p>
             <a:fld id="{46F295C0-A7ED-4981-BDF3-50DDEF888CA2}" type="datetimeFigureOut">
               <a:rPr lang="ko-KR" altLang="en-US" smtClean="0"/>
-              <a:t>2025-09-19</a:t>
+              <a:t>2025-09-20</a:t>
             </a:fld>
             <a:endParaRPr lang="ko-KR" altLang="en-US"/>
           </a:p>
@@ -1133,7 +1140,7 @@
           <a:p>
             <a:fld id="{46F295C0-A7ED-4981-BDF3-50DDEF888CA2}" type="datetimeFigureOut">
               <a:rPr lang="ko-KR" altLang="en-US" smtClean="0"/>
-              <a:t>2025-09-19</a:t>
+              <a:t>2025-09-20</a:t>
             </a:fld>
             <a:endParaRPr lang="ko-KR" altLang="en-US"/>
           </a:p>
@@ -1398,7 +1405,7 @@
           <a:p>
             <a:fld id="{46F295C0-A7ED-4981-BDF3-50DDEF888CA2}" type="datetimeFigureOut">
               <a:rPr lang="ko-KR" altLang="en-US" smtClean="0"/>
-              <a:t>2025-09-19</a:t>
+              <a:t>2025-09-20</a:t>
             </a:fld>
             <a:endParaRPr lang="ko-KR" altLang="en-US"/>
           </a:p>
@@ -1810,7 +1817,7 @@
           <a:p>
             <a:fld id="{46F295C0-A7ED-4981-BDF3-50DDEF888CA2}" type="datetimeFigureOut">
               <a:rPr lang="ko-KR" altLang="en-US" smtClean="0"/>
-              <a:t>2025-09-19</a:t>
+              <a:t>2025-09-20</a:t>
             </a:fld>
             <a:endParaRPr lang="ko-KR" altLang="en-US"/>
           </a:p>
@@ -1951,7 +1958,7 @@
           <a:p>
             <a:fld id="{46F295C0-A7ED-4981-BDF3-50DDEF888CA2}" type="datetimeFigureOut">
               <a:rPr lang="ko-KR" altLang="en-US" smtClean="0"/>
-              <a:t>2025-09-19</a:t>
+              <a:t>2025-09-20</a:t>
             </a:fld>
             <a:endParaRPr lang="ko-KR" altLang="en-US"/>
           </a:p>
@@ -2064,7 +2071,7 @@
           <a:p>
             <a:fld id="{46F295C0-A7ED-4981-BDF3-50DDEF888CA2}" type="datetimeFigureOut">
               <a:rPr lang="ko-KR" altLang="en-US" smtClean="0"/>
-              <a:t>2025-09-19</a:t>
+              <a:t>2025-09-20</a:t>
             </a:fld>
             <a:endParaRPr lang="ko-KR" altLang="en-US"/>
           </a:p>
@@ -2375,7 +2382,7 @@
           <a:p>
             <a:fld id="{46F295C0-A7ED-4981-BDF3-50DDEF888CA2}" type="datetimeFigureOut">
               <a:rPr lang="ko-KR" altLang="en-US" smtClean="0"/>
-              <a:t>2025-09-19</a:t>
+              <a:t>2025-09-20</a:t>
             </a:fld>
             <a:endParaRPr lang="ko-KR" altLang="en-US"/>
           </a:p>
@@ -2663,7 +2670,7 @@
           <a:p>
             <a:fld id="{46F295C0-A7ED-4981-BDF3-50DDEF888CA2}" type="datetimeFigureOut">
               <a:rPr lang="ko-KR" altLang="en-US" smtClean="0"/>
-              <a:t>2025-09-19</a:t>
+              <a:t>2025-09-20</a:t>
             </a:fld>
             <a:endParaRPr lang="ko-KR" altLang="en-US"/>
           </a:p>
@@ -2904,7 +2911,7 @@
           <a:p>
             <a:fld id="{46F295C0-A7ED-4981-BDF3-50DDEF888CA2}" type="datetimeFigureOut">
               <a:rPr lang="ko-KR" altLang="en-US" smtClean="0"/>
-              <a:t>2025-09-19</a:t>
+              <a:t>2025-09-20</a:t>
             </a:fld>
             <a:endParaRPr lang="ko-KR" altLang="en-US"/>
           </a:p>
@@ -3481,6 +3488,678 @@
 </p:sld>
 </file>
 
+<file path=ppt/slides/slide2.xml><?xml version="1.0" encoding="utf-8"?>
+<p:sld xmlns:a="http://schemas.openxmlformats.org/drawingml/2006/main" xmlns:r="http://schemas.openxmlformats.org/officeDocument/2006/relationships" xmlns:p="http://schemas.openxmlformats.org/presentationml/2006/main">
+  <p:cSld>
+    <p:spTree>
+      <p:nvGrpSpPr>
+        <p:cNvPr id="1" name=""/>
+        <p:cNvGrpSpPr/>
+        <p:nvPr/>
+      </p:nvGrpSpPr>
+      <p:grpSpPr>
+        <a:xfrm>
+          <a:off x="0" y="0"/>
+          <a:ext cx="0" cy="0"/>
+          <a:chOff x="0" y="0"/>
+          <a:chExt cx="0" cy="0"/>
+        </a:xfrm>
+      </p:grpSpPr>
+      <p:sp>
+        <p:nvSpPr>
+          <p:cNvPr id="6" name="TextBox 5">
+            <a:extLst>
+              <a:ext uri="{FF2B5EF4-FFF2-40B4-BE49-F238E27FC236}">
+                <a16:creationId xmlns:a16="http://schemas.microsoft.com/office/drawing/2014/main" id="{18AFBAAE-1C5F-0DED-A54B-F4EC4E8A6706}"/>
+              </a:ext>
+            </a:extLst>
+          </p:cNvPr>
+          <p:cNvSpPr txBox="1"/>
+          <p:nvPr/>
+        </p:nvSpPr>
+        <p:spPr>
+          <a:xfrm>
+            <a:off x="588460" y="231511"/>
+            <a:ext cx="4967785" cy="923330"/>
+          </a:xfrm>
+          <a:prstGeom prst="rect">
+            <a:avLst/>
+          </a:prstGeom>
+          <a:noFill/>
+        </p:spPr>
+        <p:txBody>
+          <a:bodyPr wrap="square" rtlCol="0">
+            <a:spAutoFit/>
+          </a:bodyPr>
+          <a:lstStyle/>
+          <a:p>
+            <a:r>
+              <a:rPr lang="ko-KR" altLang="en-US" dirty="0"/>
+              <a:t>성적</a:t>
+            </a:r>
+            <a:endParaRPr lang="en-US" altLang="ko-KR" dirty="0"/>
+          </a:p>
+          <a:p>
+            <a:r>
+              <a:rPr lang="en-US" altLang="ko-KR" dirty="0"/>
+              <a:t>  </a:t>
+            </a:r>
+            <a:r>
+              <a:rPr lang="ko-KR" altLang="en-US" dirty="0"/>
+              <a:t>이번 시즌 </a:t>
+            </a:r>
+            <a:r>
+              <a:rPr lang="en-US" altLang="ko-KR" dirty="0"/>
+              <a:t>: 00</a:t>
+            </a:r>
+            <a:r>
+              <a:rPr lang="ko-KR" altLang="en-US" dirty="0"/>
+              <a:t>승 </a:t>
+            </a:r>
+            <a:r>
+              <a:rPr lang="en-US" altLang="ko-KR" dirty="0"/>
+              <a:t>0</a:t>
+            </a:r>
+            <a:r>
+              <a:rPr lang="ko-KR" altLang="en-US" dirty="0"/>
+              <a:t>패 </a:t>
+            </a:r>
+            <a:r>
+              <a:rPr lang="en-US" altLang="ko-KR" dirty="0"/>
+              <a:t>0</a:t>
+            </a:r>
+            <a:r>
+              <a:rPr lang="ko-KR" altLang="en-US" dirty="0"/>
+              <a:t>무</a:t>
+            </a:r>
+            <a:endParaRPr lang="en-US" altLang="ko-KR" dirty="0"/>
+          </a:p>
+          <a:p>
+            <a:r>
+              <a:rPr lang="ko-KR" altLang="en-US" dirty="0"/>
+              <a:t>  </a:t>
+            </a:r>
+            <a:r>
+              <a:rPr lang="ko-KR" altLang="en-US" dirty="0" err="1"/>
+              <a:t>이번달</a:t>
+            </a:r>
+            <a:r>
+              <a:rPr lang="ko-KR" altLang="en-US" dirty="0"/>
+              <a:t>    </a:t>
+            </a:r>
+            <a:r>
+              <a:rPr lang="en-US" altLang="ko-KR" dirty="0"/>
+              <a:t> : 00</a:t>
+            </a:r>
+            <a:r>
+              <a:rPr lang="ko-KR" altLang="en-US" dirty="0"/>
+              <a:t>승 </a:t>
+            </a:r>
+            <a:r>
+              <a:rPr lang="en-US" altLang="ko-KR" dirty="0"/>
+              <a:t>0</a:t>
+            </a:r>
+            <a:r>
+              <a:rPr lang="ko-KR" altLang="en-US" dirty="0"/>
+              <a:t>패 </a:t>
+            </a:r>
+            <a:r>
+              <a:rPr lang="en-US" altLang="ko-KR" dirty="0"/>
+              <a:t>0</a:t>
+            </a:r>
+            <a:r>
+              <a:rPr lang="ko-KR" altLang="en-US" dirty="0"/>
+              <a:t>무</a:t>
+            </a:r>
+          </a:p>
+        </p:txBody>
+      </p:sp>
+      <p:sp>
+        <p:nvSpPr>
+          <p:cNvPr id="8" name="TextBox 7">
+            <a:extLst>
+              <a:ext uri="{FF2B5EF4-FFF2-40B4-BE49-F238E27FC236}">
+                <a16:creationId xmlns:a16="http://schemas.microsoft.com/office/drawing/2014/main" id="{D027CE8B-5E06-5AE4-196A-5D8EC0839115}"/>
+              </a:ext>
+            </a:extLst>
+          </p:cNvPr>
+          <p:cNvSpPr txBox="1"/>
+          <p:nvPr/>
+        </p:nvSpPr>
+        <p:spPr>
+          <a:xfrm>
+            <a:off x="4457334" y="231511"/>
+            <a:ext cx="1651414" cy="369332"/>
+          </a:xfrm>
+          <a:prstGeom prst="rect">
+            <a:avLst/>
+          </a:prstGeom>
+          <a:noFill/>
+        </p:spPr>
+        <p:txBody>
+          <a:bodyPr wrap="none" rtlCol="0">
+            <a:spAutoFit/>
+          </a:bodyPr>
+          <a:lstStyle/>
+          <a:p>
+            <a:r>
+              <a:rPr lang="ko-KR" altLang="en-US" dirty="0"/>
+              <a:t>선수 조회하기</a:t>
+            </a:r>
+          </a:p>
+        </p:txBody>
+      </p:sp>
+      <p:sp>
+        <p:nvSpPr>
+          <p:cNvPr id="9" name="TextBox 8">
+            <a:extLst>
+              <a:ext uri="{FF2B5EF4-FFF2-40B4-BE49-F238E27FC236}">
+                <a16:creationId xmlns:a16="http://schemas.microsoft.com/office/drawing/2014/main" id="{EE054127-DD1C-A054-ED5D-75DBBD894667}"/>
+              </a:ext>
+            </a:extLst>
+          </p:cNvPr>
+          <p:cNvSpPr txBox="1"/>
+          <p:nvPr/>
+        </p:nvSpPr>
+        <p:spPr>
+          <a:xfrm>
+            <a:off x="6096000" y="231511"/>
+            <a:ext cx="2625235" cy="369332"/>
+          </a:xfrm>
+          <a:prstGeom prst="rect">
+            <a:avLst/>
+          </a:prstGeom>
+          <a:noFill/>
+        </p:spPr>
+        <p:txBody>
+          <a:bodyPr wrap="square" rtlCol="0">
+            <a:spAutoFit/>
+          </a:bodyPr>
+          <a:lstStyle/>
+          <a:p>
+            <a:r>
+              <a:rPr lang="ko-KR" altLang="en-US" dirty="0"/>
+              <a:t>선수이름 </a:t>
+            </a:r>
+            <a:r>
+              <a:rPr lang="ko-KR" altLang="en-US" dirty="0" err="1"/>
+              <a:t>입력창</a:t>
+            </a:r>
+            <a:endParaRPr lang="ko-KR" altLang="en-US" dirty="0"/>
+          </a:p>
+        </p:txBody>
+      </p:sp>
+      <p:sp>
+        <p:nvSpPr>
+          <p:cNvPr id="10" name="직사각형 9">
+            <a:extLst>
+              <a:ext uri="{FF2B5EF4-FFF2-40B4-BE49-F238E27FC236}">
+                <a16:creationId xmlns:a16="http://schemas.microsoft.com/office/drawing/2014/main" id="{A660FD3F-DD71-8E82-DC74-80F6BB6BA195}"/>
+              </a:ext>
+            </a:extLst>
+          </p:cNvPr>
+          <p:cNvSpPr/>
+          <p:nvPr/>
+        </p:nvSpPr>
+        <p:spPr>
+          <a:xfrm>
+            <a:off x="588459" y="2079811"/>
+            <a:ext cx="11486999" cy="4546677"/>
+          </a:xfrm>
+          <a:prstGeom prst="rect">
+            <a:avLst/>
+          </a:prstGeom>
+          <a:noFill/>
+          <a:ln>
+            <a:solidFill>
+              <a:schemeClr val="tx1"/>
+            </a:solidFill>
+          </a:ln>
+        </p:spPr>
+        <p:style>
+          <a:lnRef idx="2">
+            <a:schemeClr val="accent1">
+              <a:shade val="15000"/>
+            </a:schemeClr>
+          </a:lnRef>
+          <a:fillRef idx="1">
+            <a:schemeClr val="accent1"/>
+          </a:fillRef>
+          <a:effectRef idx="0">
+            <a:schemeClr val="accent1"/>
+          </a:effectRef>
+          <a:fontRef idx="minor">
+            <a:schemeClr val="lt1"/>
+          </a:fontRef>
+        </p:style>
+        <p:txBody>
+          <a:bodyPr rtlCol="0" anchor="ctr"/>
+          <a:lstStyle/>
+          <a:p>
+            <a:pPr algn="ctr"/>
+            <a:endParaRPr lang="ko-KR" altLang="en-US"/>
+          </a:p>
+        </p:txBody>
+      </p:sp>
+      <p:sp>
+        <p:nvSpPr>
+          <p:cNvPr id="11" name="TextBox 10">
+            <a:extLst>
+              <a:ext uri="{FF2B5EF4-FFF2-40B4-BE49-F238E27FC236}">
+                <a16:creationId xmlns:a16="http://schemas.microsoft.com/office/drawing/2014/main" id="{078410DD-AD6A-8E75-4A9F-23E7351A0CE5}"/>
+              </a:ext>
+            </a:extLst>
+          </p:cNvPr>
+          <p:cNvSpPr txBox="1"/>
+          <p:nvPr/>
+        </p:nvSpPr>
+        <p:spPr>
+          <a:xfrm>
+            <a:off x="4998584" y="1568858"/>
+            <a:ext cx="2194832" cy="369332"/>
+          </a:xfrm>
+          <a:prstGeom prst="rect">
+            <a:avLst/>
+          </a:prstGeom>
+          <a:noFill/>
+        </p:spPr>
+        <p:txBody>
+          <a:bodyPr wrap="none" rtlCol="0">
+            <a:spAutoFit/>
+          </a:bodyPr>
+          <a:lstStyle/>
+          <a:p>
+            <a:r>
+              <a:rPr lang="ko-KR" altLang="en-US" dirty="0" err="1"/>
+              <a:t>한화이글스</a:t>
+            </a:r>
+            <a:r>
+              <a:rPr lang="ko-KR" altLang="en-US" dirty="0"/>
+              <a:t> 선수단</a:t>
+            </a:r>
+          </a:p>
+        </p:txBody>
+      </p:sp>
+      <p:sp>
+        <p:nvSpPr>
+          <p:cNvPr id="12" name="TextBox 11">
+            <a:extLst>
+              <a:ext uri="{FF2B5EF4-FFF2-40B4-BE49-F238E27FC236}">
+                <a16:creationId xmlns:a16="http://schemas.microsoft.com/office/drawing/2014/main" id="{8C325938-35BD-0A5F-751E-9275B71D2FF3}"/>
+              </a:ext>
+            </a:extLst>
+          </p:cNvPr>
+          <p:cNvSpPr txBox="1"/>
+          <p:nvPr/>
+        </p:nvSpPr>
+        <p:spPr>
+          <a:xfrm>
+            <a:off x="588459" y="2226631"/>
+            <a:ext cx="11421035" cy="584775"/>
+          </a:xfrm>
+          <a:prstGeom prst="rect">
+            <a:avLst/>
+          </a:prstGeom>
+          <a:noFill/>
+        </p:spPr>
+        <p:txBody>
+          <a:bodyPr wrap="square" rtlCol="0">
+            <a:spAutoFit/>
+          </a:bodyPr>
+          <a:lstStyle/>
+          <a:p>
+            <a:r>
+              <a:rPr lang="ko-KR" altLang="en-US" sz="1600" dirty="0"/>
+              <a:t>순번 이름 포지션 팀 나이 투</a:t>
+            </a:r>
+            <a:r>
+              <a:rPr lang="en-US" altLang="ko-KR" sz="1600" dirty="0"/>
+              <a:t>/</a:t>
+            </a:r>
+            <a:r>
+              <a:rPr lang="ko-KR" altLang="en-US" sz="1600" dirty="0"/>
+              <a:t>타 성실도 지능 리더십</a:t>
+            </a:r>
+            <a:r>
+              <a:rPr lang="en-US" altLang="ko-KR" sz="1600" dirty="0"/>
+              <a:t> </a:t>
+            </a:r>
+            <a:r>
+              <a:rPr lang="ko-KR" altLang="en-US" sz="1600" dirty="0"/>
+              <a:t>충성심 우승  욕심  부상여부  부상</a:t>
+            </a:r>
+            <a:r>
+              <a:rPr lang="en-US" altLang="ko-KR" sz="1600" dirty="0"/>
+              <a:t>     </a:t>
+            </a:r>
+            <a:r>
+              <a:rPr lang="ko-KR" altLang="en-US" sz="1600" dirty="0"/>
+              <a:t>경기감각  종합  역할      기대치</a:t>
+            </a:r>
+            <a:endParaRPr lang="en-US" altLang="ko-KR" sz="1600" dirty="0"/>
+          </a:p>
+          <a:p>
+            <a:r>
+              <a:rPr lang="en-US" altLang="ko-KR" sz="1600" dirty="0"/>
+              <a:t>                                                                             </a:t>
+            </a:r>
+            <a:r>
+              <a:rPr lang="ko-KR" altLang="en-US" sz="1600" dirty="0"/>
+              <a:t>열망                     가능성      저하     사기  만족도</a:t>
+            </a:r>
+          </a:p>
+        </p:txBody>
+      </p:sp>
+      <p:sp>
+        <p:nvSpPr>
+          <p:cNvPr id="13" name="직사각형 12">
+            <a:extLst>
+              <a:ext uri="{FF2B5EF4-FFF2-40B4-BE49-F238E27FC236}">
+                <a16:creationId xmlns:a16="http://schemas.microsoft.com/office/drawing/2014/main" id="{92A43D82-D13C-145C-28F6-267AFF1CDE0D}"/>
+              </a:ext>
+            </a:extLst>
+          </p:cNvPr>
+          <p:cNvSpPr/>
+          <p:nvPr/>
+        </p:nvSpPr>
+        <p:spPr>
+          <a:xfrm>
+            <a:off x="9628094" y="212011"/>
+            <a:ext cx="2447364" cy="627530"/>
+          </a:xfrm>
+          <a:prstGeom prst="rect">
+            <a:avLst/>
+          </a:prstGeom>
+        </p:spPr>
+        <p:style>
+          <a:lnRef idx="2">
+            <a:schemeClr val="accent1">
+              <a:shade val="15000"/>
+            </a:schemeClr>
+          </a:lnRef>
+          <a:fillRef idx="1">
+            <a:schemeClr val="accent1"/>
+          </a:fillRef>
+          <a:effectRef idx="0">
+            <a:schemeClr val="accent1"/>
+          </a:effectRef>
+          <a:fontRef idx="minor">
+            <a:schemeClr val="lt1"/>
+          </a:fontRef>
+        </p:style>
+        <p:txBody>
+          <a:bodyPr rtlCol="0" anchor="ctr"/>
+          <a:lstStyle/>
+          <a:p>
+            <a:pPr algn="ctr"/>
+            <a:r>
+              <a:rPr lang="ko-KR" altLang="en-US"/>
+              <a:t>트레이딩 블록 확인</a:t>
+            </a:r>
+          </a:p>
+        </p:txBody>
+      </p:sp>
+    </p:spTree>
+    <p:extLst>
+      <p:ext uri="{BB962C8B-B14F-4D97-AF65-F5344CB8AC3E}">
+        <p14:creationId xmlns:p14="http://schemas.microsoft.com/office/powerpoint/2010/main" val="1122925690"/>
+      </p:ext>
+    </p:extLst>
+  </p:cSld>
+  <p:clrMapOvr>
+    <a:masterClrMapping/>
+  </p:clrMapOvr>
+</p:sld>
+</file>
+
+<file path=ppt/slides/slide3.xml><?xml version="1.0" encoding="utf-8"?>
+<p:sld xmlns:a="http://schemas.openxmlformats.org/drawingml/2006/main" xmlns:r="http://schemas.openxmlformats.org/officeDocument/2006/relationships" xmlns:p="http://schemas.openxmlformats.org/presentationml/2006/main">
+  <p:cSld>
+    <p:spTree>
+      <p:nvGrpSpPr>
+        <p:cNvPr id="1" name=""/>
+        <p:cNvGrpSpPr/>
+        <p:nvPr/>
+      </p:nvGrpSpPr>
+      <p:grpSpPr>
+        <a:xfrm>
+          <a:off x="0" y="0"/>
+          <a:ext cx="0" cy="0"/>
+          <a:chOff x="0" y="0"/>
+          <a:chExt cx="0" cy="0"/>
+        </a:xfrm>
+      </p:grpSpPr>
+      <p:sp>
+        <p:nvSpPr>
+          <p:cNvPr id="4" name="직사각형 3">
+            <a:extLst>
+              <a:ext uri="{FF2B5EF4-FFF2-40B4-BE49-F238E27FC236}">
+                <a16:creationId xmlns:a16="http://schemas.microsoft.com/office/drawing/2014/main" id="{C67F55CE-BC1F-1C2C-A38F-95B87D01A913}"/>
+              </a:ext>
+            </a:extLst>
+          </p:cNvPr>
+          <p:cNvSpPr/>
+          <p:nvPr/>
+        </p:nvSpPr>
+        <p:spPr>
+          <a:xfrm>
+            <a:off x="507776" y="1828799"/>
+            <a:ext cx="11486999" cy="4546677"/>
+          </a:xfrm>
+          <a:prstGeom prst="rect">
+            <a:avLst/>
+          </a:prstGeom>
+          <a:noFill/>
+          <a:ln>
+            <a:solidFill>
+              <a:schemeClr val="tx1"/>
+            </a:solidFill>
+          </a:ln>
+        </p:spPr>
+        <p:style>
+          <a:lnRef idx="2">
+            <a:schemeClr val="accent1">
+              <a:shade val="15000"/>
+            </a:schemeClr>
+          </a:lnRef>
+          <a:fillRef idx="1">
+            <a:schemeClr val="accent1"/>
+          </a:fillRef>
+          <a:effectRef idx="0">
+            <a:schemeClr val="accent1"/>
+          </a:effectRef>
+          <a:fontRef idx="minor">
+            <a:schemeClr val="lt1"/>
+          </a:fontRef>
+        </p:style>
+        <p:txBody>
+          <a:bodyPr rtlCol="0" anchor="ctr"/>
+          <a:lstStyle/>
+          <a:p>
+            <a:pPr algn="ctr"/>
+            <a:endParaRPr lang="ko-KR" altLang="en-US"/>
+          </a:p>
+        </p:txBody>
+      </p:sp>
+      <p:sp>
+        <p:nvSpPr>
+          <p:cNvPr id="5" name="TextBox 4">
+            <a:extLst>
+              <a:ext uri="{FF2B5EF4-FFF2-40B4-BE49-F238E27FC236}">
+                <a16:creationId xmlns:a16="http://schemas.microsoft.com/office/drawing/2014/main" id="{779BDA78-6A55-47CC-A825-EF4190AE74AA}"/>
+              </a:ext>
+            </a:extLst>
+          </p:cNvPr>
+          <p:cNvSpPr txBox="1"/>
+          <p:nvPr/>
+        </p:nvSpPr>
+        <p:spPr>
+          <a:xfrm>
+            <a:off x="5392586" y="1201391"/>
+            <a:ext cx="1651414" cy="369332"/>
+          </a:xfrm>
+          <a:prstGeom prst="rect">
+            <a:avLst/>
+          </a:prstGeom>
+          <a:noFill/>
+        </p:spPr>
+        <p:txBody>
+          <a:bodyPr wrap="none" rtlCol="0">
+            <a:spAutoFit/>
+          </a:bodyPr>
+          <a:lstStyle/>
+          <a:p>
+            <a:r>
+              <a:rPr lang="ko-KR" altLang="en-US" dirty="0"/>
+              <a:t>트레이딩 블록</a:t>
+            </a:r>
+          </a:p>
+        </p:txBody>
+      </p:sp>
+      <p:sp>
+        <p:nvSpPr>
+          <p:cNvPr id="6" name="TextBox 5">
+            <a:extLst>
+              <a:ext uri="{FF2B5EF4-FFF2-40B4-BE49-F238E27FC236}">
+                <a16:creationId xmlns:a16="http://schemas.microsoft.com/office/drawing/2014/main" id="{B39A96B9-5C35-CB5E-1ABD-9ACDD782D4A7}"/>
+              </a:ext>
+            </a:extLst>
+          </p:cNvPr>
+          <p:cNvSpPr txBox="1"/>
+          <p:nvPr/>
+        </p:nvSpPr>
+        <p:spPr>
+          <a:xfrm>
+            <a:off x="507776" y="1975619"/>
+            <a:ext cx="11421035" cy="584775"/>
+          </a:xfrm>
+          <a:prstGeom prst="rect">
+            <a:avLst/>
+          </a:prstGeom>
+          <a:noFill/>
+        </p:spPr>
+        <p:txBody>
+          <a:bodyPr wrap="square" rtlCol="0">
+            <a:spAutoFit/>
+          </a:bodyPr>
+          <a:lstStyle/>
+          <a:p>
+            <a:r>
+              <a:rPr lang="ko-KR" altLang="en-US" sz="1600" dirty="0"/>
+              <a:t>순번 이름 포지션 팀 나이 투</a:t>
+            </a:r>
+            <a:r>
+              <a:rPr lang="en-US" altLang="ko-KR" sz="1600" dirty="0"/>
+              <a:t>/</a:t>
+            </a:r>
+            <a:r>
+              <a:rPr lang="ko-KR" altLang="en-US" sz="1600" dirty="0"/>
+              <a:t>타 성실도 지능 리더십</a:t>
+            </a:r>
+            <a:r>
+              <a:rPr lang="en-US" altLang="ko-KR" sz="1600" dirty="0"/>
+              <a:t> </a:t>
+            </a:r>
+            <a:r>
+              <a:rPr lang="ko-KR" altLang="en-US" sz="1600" dirty="0"/>
+              <a:t>충성심 우승  욕심  부상여부  부상</a:t>
+            </a:r>
+            <a:r>
+              <a:rPr lang="en-US" altLang="ko-KR" sz="1600" dirty="0"/>
+              <a:t>     </a:t>
+            </a:r>
+            <a:r>
+              <a:rPr lang="ko-KR" altLang="en-US" sz="1600" dirty="0"/>
+              <a:t>경기감각  종합  역할      기대치</a:t>
+            </a:r>
+            <a:endParaRPr lang="en-US" altLang="ko-KR" sz="1600" dirty="0"/>
+          </a:p>
+          <a:p>
+            <a:r>
+              <a:rPr lang="en-US" altLang="ko-KR" sz="1600" dirty="0"/>
+              <a:t>                                                                             </a:t>
+            </a:r>
+            <a:r>
+              <a:rPr lang="ko-KR" altLang="en-US" sz="1600" dirty="0"/>
+              <a:t>열망                     가능성      저하     사기  만족도</a:t>
+            </a:r>
+          </a:p>
+        </p:txBody>
+      </p:sp>
+      <p:sp>
+        <p:nvSpPr>
+          <p:cNvPr id="7" name="직사각형 6">
+            <a:extLst>
+              <a:ext uri="{FF2B5EF4-FFF2-40B4-BE49-F238E27FC236}">
+                <a16:creationId xmlns:a16="http://schemas.microsoft.com/office/drawing/2014/main" id="{7E0EEE7D-63A6-C7DD-D884-E0402BF473AF}"/>
+              </a:ext>
+            </a:extLst>
+          </p:cNvPr>
+          <p:cNvSpPr/>
+          <p:nvPr/>
+        </p:nvSpPr>
+        <p:spPr>
+          <a:xfrm>
+            <a:off x="349623" y="168759"/>
+            <a:ext cx="2447364" cy="627530"/>
+          </a:xfrm>
+          <a:prstGeom prst="rect">
+            <a:avLst/>
+          </a:prstGeom>
+        </p:spPr>
+        <p:style>
+          <a:lnRef idx="2">
+            <a:schemeClr val="accent1">
+              <a:shade val="15000"/>
+            </a:schemeClr>
+          </a:lnRef>
+          <a:fillRef idx="1">
+            <a:schemeClr val="accent1"/>
+          </a:fillRef>
+          <a:effectRef idx="0">
+            <a:schemeClr val="accent1"/>
+          </a:effectRef>
+          <a:fontRef idx="minor">
+            <a:schemeClr val="lt1"/>
+          </a:fontRef>
+        </p:style>
+        <p:txBody>
+          <a:bodyPr rtlCol="0" anchor="ctr"/>
+          <a:lstStyle/>
+          <a:p>
+            <a:pPr algn="ctr"/>
+            <a:r>
+              <a:rPr lang="ko-KR" altLang="en-US" dirty="0" err="1"/>
+              <a:t>메인화면으로</a:t>
+            </a:r>
+            <a:r>
+              <a:rPr lang="ko-KR" altLang="en-US" dirty="0"/>
+              <a:t> </a:t>
+            </a:r>
+            <a:endParaRPr lang="en-US" altLang="ko-KR" dirty="0"/>
+          </a:p>
+          <a:p>
+            <a:pPr algn="ctr"/>
+            <a:r>
+              <a:rPr lang="ko-KR" altLang="en-US" dirty="0"/>
+              <a:t>돌아가기</a:t>
+            </a:r>
+          </a:p>
+        </p:txBody>
+      </p:sp>
+    </p:spTree>
+    <p:extLst>
+      <p:ext uri="{BB962C8B-B14F-4D97-AF65-F5344CB8AC3E}">
+        <p14:creationId xmlns:p14="http://schemas.microsoft.com/office/powerpoint/2010/main" val="3527169713"/>
+      </p:ext>
+    </p:extLst>
+  </p:cSld>
+  <p:clrMapOvr>
+    <a:masterClrMapping/>
+  </p:clrMapOvr>
+</p:sld>
+</file>
+
 <file path=ppt/theme/theme1.xml><?xml version="1.0" encoding="utf-8"?>
 <a:theme xmlns:a="http://schemas.openxmlformats.org/drawingml/2006/main" name="Office 테마">
   <a:themeElements>
